--- a/reports/space_hasos_stage_io.pptx
+++ b/reports/space_hasos_stage_io.pptx
@@ -2,7 +2,7 @@
 <file path=ppt/presentation.xml><?xml version="1.0" encoding="utf-8"?>
 <p:presentation xmlns:a="http://schemas.openxmlformats.org/drawingml/2006/main" xmlns:r="http://schemas.openxmlformats.org/officeDocument/2006/relationships" xmlns:p="http://schemas.openxmlformats.org/presentationml/2006/main">
   <p:sldMasterIdLst>
-    <p:sldMasterId id="2147483648" r:id="rId12"/>
+    <p:sldMasterId id="2147483648" r:id="rId13"/>
   </p:sldMasterIdLst>
   <p:sldIdLst>
     <p:sldId id="256" r:id="rId1"/>
@@ -16,6 +16,7 @@
     <p:sldId id="264" r:id="rId9"/>
     <p:sldId id="265" r:id="rId10"/>
     <p:sldId id="266" r:id="rId11"/>
+    <p:sldId id="267" r:id="rId12"/>
   </p:sldIdLst>
   <p:sldSz cx="12192000" cy="6858000" type="wide"/>
   <p:notesSz cx="6858000" cy="9144000"/>
@@ -410,7 +411,7 @@
                   <a:srgbClr val="2563EB"/>
                 </a:solidFill>
               </a:rPr>
-              <a:t>FILES FOR AUDIT</a:t>
+              <a:t>POST-RANK BUCKETS</a:t>
             </a:r>
             <a:endParaRPr lang="vi-VN" sz="800"/>
           </a:p>
@@ -446,7 +447,7 @@
                   <a:srgbClr val="14213D"/>
                 </a:solidFill>
               </a:rPr>
-              <a:t>Stage 7: Export + scoring outputs</a:t>
+              <a:t>Stage 6: Sentiment split</a:t>
             </a:r>
             <a:endParaRPr lang="vi-VN" sz="2300"/>
           </a:p>
@@ -482,7 +483,7 @@
         <p:spPr>
           <a:xfrm>
             <a:off x="685800" y="1234440"/>
-            <a:ext cx="4434840" cy="1234440"/>
+            <a:ext cx="4800600" cy="1234440"/>
           </a:xfrm>
           <a:prstGeom prst="rect">
             <a:avLst/>
@@ -501,47 +502,25 @@
           <a:lstStyle/>
           <a:p>
             <a:r>
-              <a:rPr lang="vi-VN" sz="1150" dirty="0">
-                <a:solidFill>
-                  <a:srgbClr val="14213D"/>
-                </a:solidFill>
-              </a:rPr>
-              <a:t>Export input</a:t>
-            </a:r>
-            <a:endParaRPr lang="vi-VN" sz="1150"/>
-          </a:p>
-          <a:p>
-            <a:r>
-              <a:rPr lang="vi-VN" sz="1150" dirty="0">
-                <a:solidFill>
-                  <a:srgbClr val="14213D"/>
-                </a:solidFill>
-              </a:rPr>
-              <a:t>File tree:</a:t>
-            </a:r>
-            <a:endParaRPr lang="vi-VN" sz="1150"/>
-          </a:p>
-          <a:p>
-            <a:r>
-              <a:rPr lang="vi-VN" sz="1150" dirty="0">
-                <a:solidFill>
-                  <a:srgbClr val="14213D"/>
-                </a:solidFill>
-              </a:rPr>
-              <a:t>outputs/space_hasos_full_e20/</a:t>
-            </a:r>
-            <a:endParaRPr lang="vi-VN" sz="1150"/>
-          </a:p>
-          <a:p>
-            <a:r>
-              <a:rPr lang="vi-VN" sz="1150" dirty="0">
-                <a:solidFill>
-                  <a:srgbClr val="14213D"/>
-                </a:solidFill>
-              </a:rPr>
-              <a:t>outputs/space_hasos_full_e20_sentiment/</a:t>
-            </a:r>
-            <a:endParaRPr lang="vi-VN" sz="1150"/>
+              <a:rPr lang="vi-VN" sz="1200" dirty="0">
+                <a:solidFill>
+                  <a:srgbClr val="14213D"/>
+                </a:solidFill>
+              </a:rPr>
+              <a:t>Input</a:t>
+            </a:r>
+            <a:endParaRPr lang="vi-VN" sz="1200"/>
+          </a:p>
+          <a:p>
+            <a:r>
+              <a:rPr lang="vi-VN" sz="1200" dirty="0">
+                <a:solidFill>
+                  <a:srgbClr val="14213D"/>
+                </a:solidFill>
+              </a:rPr>
+              <a:t>Chỉ các sentences đã được chọn cho aspect summary. Sentiment không thay đổi ranking, chỉ tách bucket sau khi đã chọn câu.</a:t>
+            </a:r>
+            <a:endParaRPr lang="vi-VN" sz="1200"/>
           </a:p>
         </p:txBody>
       </p:sp>
@@ -553,8 +532,8 @@
         </p:nvSpPr>
         <p:spPr>
           <a:xfrm>
-            <a:off x="5440680" y="1234440"/>
-            <a:ext cx="2651760" cy="1234440"/>
+            <a:off x="5806440" y="1234440"/>
+            <a:ext cx="5166360" cy="1234440"/>
           </a:xfrm>
           <a:prstGeom prst="rect">
             <a:avLst/>
@@ -573,47 +552,47 @@
           <a:lstStyle/>
           <a:p>
             <a:r>
-              <a:rPr lang="vi-VN" sz="1200" dirty="0">
-                <a:solidFill>
-                  <a:srgbClr val="14213D"/>
-                </a:solidFill>
-              </a:rPr>
-              <a:t>Export output</a:t>
-            </a:r>
-            <a:endParaRPr lang="vi-VN" sz="1200"/>
-          </a:p>
-          <a:p>
-            <a:r>
-              <a:rPr lang="vi-VN" sz="1200" dirty="0">
-                <a:solidFill>
-                  <a:srgbClr val="14213D"/>
-                </a:solidFill>
-              </a:rPr>
-              <a:t>aspect rows: 3660</a:t>
-            </a:r>
-            <a:endParaRPr lang="vi-VN" sz="1200"/>
-          </a:p>
-          <a:p>
-            <a:r>
-              <a:rPr lang="vi-VN" sz="1200" dirty="0">
-                <a:solidFill>
-                  <a:srgbClr val="14213D"/>
-                </a:solidFill>
-              </a:rPr>
-              <a:t>sentiment rows: 6110</a:t>
-            </a:r>
-            <a:endParaRPr lang="vi-VN" sz="1200"/>
-          </a:p>
-          <a:p>
-            <a:r>
-              <a:rPr lang="vi-VN" sz="1200" dirty="0">
-                <a:solidFill>
-                  <a:srgbClr val="14213D"/>
-                </a:solidFill>
-              </a:rPr>
-              <a:t>JSONL + TSV line format</a:t>
-            </a:r>
-            <a:endParaRPr lang="vi-VN" sz="1200"/>
+              <a:rPr lang="vi-VN" sz="1300" dirty="0">
+                <a:solidFill>
+                  <a:srgbClr val="14213D"/>
+                </a:solidFill>
+              </a:rPr>
+              <a:t>Output FAC_ROOM / entity 100597</a:t>
+            </a:r>
+            <a:endParaRPr lang="vi-VN" sz="1300"/>
+          </a:p>
+          <a:p>
+            <a:r>
+              <a:rPr lang="vi-VN" sz="1300" dirty="0">
+                <a:solidFill>
+                  <a:srgbClr val="14213D"/>
+                </a:solidFill>
+              </a:rPr>
+              <a:t>pos sentences: 3</a:t>
+            </a:r>
+            <a:endParaRPr lang="vi-VN" sz="1300"/>
+          </a:p>
+          <a:p>
+            <a:r>
+              <a:rPr lang="vi-VN" sz="1300" dirty="0">
+                <a:solidFill>
+                  <a:srgbClr val="14213D"/>
+                </a:solidFill>
+              </a:rPr>
+              <a:t>neg sentences: 0</a:t>
+            </a:r>
+            <a:endParaRPr lang="vi-VN" sz="1300"/>
+          </a:p>
+          <a:p>
+            <a:r>
+              <a:rPr lang="vi-VN" sz="1300" dirty="0">
+                <a:solidFill>
+                  <a:srgbClr val="14213D"/>
+                </a:solidFill>
+              </a:rPr>
+              <a:t>neu sentences: 0</a:t>
+            </a:r>
+            <a:endParaRPr lang="vi-VN" sz="1300"/>
           </a:p>
         </p:txBody>
       </p:sp>
@@ -625,128 +604,67 @@
         </p:nvSpPr>
         <p:spPr>
           <a:xfrm>
-            <a:off x="8366760" y="1234440"/>
-            <a:ext cx="2697480" cy="1417320"/>
+            <a:off x="685800" y="3063240"/>
+            <a:ext cx="10287000" cy="1280160"/>
           </a:xfrm>
           <a:prstGeom prst="rect">
             <a:avLst/>
           </a:prstGeom>
           <a:solidFill>
-            <a:srgbClr val="FFFFFF"/>
+            <a:srgbClr val="EEF6FF"/>
           </a:solidFill>
           <a:ln w="9525">
             <a:solidFill>
-              <a:srgbClr val="D8DEE9"/>
-            </a:solidFill>
-          </a:ln>
-        </p:spPr>
-        <p:txBody>
-          <a:bodyPr wrap="square" lIns="91440" tIns="45720" rIns="91440" bIns="45720"/>
-          <a:lstStyle/>
-          <a:p>
-            <a:r>
-              <a:rPr lang="vi-VN" sz="1150" dirty="0">
-                <a:solidFill>
-                  <a:srgbClr val="14213D"/>
-                </a:solidFill>
-              </a:rPr>
-              <a:t>Reference-free scores</a:t>
-            </a:r>
-            <a:endParaRPr lang="vi-VN" sz="1150"/>
-          </a:p>
-          <a:p>
-            <a:r>
-              <a:rPr lang="vi-VN" sz="1150" dirty="0">
-                <a:solidFill>
-                  <a:srgbClr val="14213D"/>
-                </a:solidFill>
-              </a:rPr>
-              <a:t>bert_f1_aspect: 0.8098</a:t>
-            </a:r>
-            <a:endParaRPr lang="vi-VN" sz="1150"/>
-          </a:p>
-          <a:p>
-            <a:r>
-              <a:rPr lang="vi-VN" sz="1150" dirty="0">
-                <a:solidFill>
-                  <a:srgbClr val="14213D"/>
-                </a:solidFill>
-              </a:rPr>
-              <a:t>bert_f1_source: 0.8074</a:t>
-            </a:r>
-            <a:endParaRPr lang="vi-VN" sz="1150"/>
-          </a:p>
-          <a:p>
-            <a:r>
-              <a:rPr lang="vi-VN" sz="1150" dirty="0">
-                <a:solidFill>
-                  <a:srgbClr val="14213D"/>
-                </a:solidFill>
-              </a:rPr>
-              <a:t>aspect_purity: 0.5517</a:t>
-            </a:r>
-            <a:endParaRPr lang="vi-VN" sz="1150"/>
-          </a:p>
-        </p:txBody>
-      </p:sp>
-      <p:sp>
-        <p:nvSpPr>
-          <p:cNvPr id="8" name="Text 8"/>
-          <p:cNvSpPr txBox="1"/>
-          <p:nvPr/>
-        </p:nvSpPr>
-        <p:spPr>
-          <a:xfrm>
-            <a:off x="685800" y="3520440"/>
-            <a:ext cx="10378440" cy="960120"/>
-          </a:xfrm>
-          <a:prstGeom prst="rect">
-            <a:avLst/>
-          </a:prstGeom>
-          <a:solidFill>
-            <a:srgbClr val="FFF7ED"/>
-          </a:solidFill>
-          <a:ln w="9525">
-            <a:solidFill>
-              <a:srgbClr val="FDBA74"/>
-            </a:solidFill>
-          </a:ln>
-        </p:spPr>
-        <p:txBody>
-          <a:bodyPr wrap="square" lIns="91440" tIns="45720" rIns="91440" bIns="45720"/>
-          <a:lstStyle/>
-          <a:p>
-            <a:r>
-              <a:rPr lang="vi-VN" sz="1150" dirty="0">
-                <a:solidFill>
-                  <a:srgbClr val="14213D"/>
-                </a:solidFill>
-              </a:rPr>
-              <a:t>Original ROUGE lane</a:t>
-            </a:r>
-            <a:endParaRPr lang="vi-VN" sz="1150"/>
-          </a:p>
-          <a:p>
-            <a:r>
-              <a:rPr lang="vi-VN" sz="1150" dirty="0">
-                <a:solidFill>
-                  <a:srgbClr val="14213D"/>
-                </a:solidFill>
-              </a:rPr>
-              <a:t>Input thiếu: data/hasos/gold/&lt;aspect&gt;/#ID#_[012].txt</a:t>
-            </a:r>
-            <a:endParaRPr lang="vi-VN" sz="1150"/>
-          </a:p>
-          <a:p>
-            <a:r>
-              <a:rPr lang="vi-VN" sz="1150" dirty="0">
-                <a:solidFill>
-                  <a:srgbClr val="14213D"/>
-                </a:solidFill>
-              </a:rPr>
-              <a:t>Khi có gold, rerun aspect_inference.py without --no_eval để sinh eval_&lt;run_id&gt;.json/txt.</a:t>
-            </a:r>
-            <a:endParaRPr lang="vi-VN" sz="1150"/>
+              <a:srgbClr val="BFDBFE"/>
+            </a:solidFill>
+          </a:ln>
+        </p:spPr>
+        <p:txBody>
+          <a:bodyPr wrap="square" lIns="91440" tIns="45720" rIns="91440" bIns="45720"/>
+          <a:lstStyle/>
+          <a:p>
+            <a:r>
+              <a:rPr lang="vi-VN" sz="1050" dirty="0">
+                <a:solidFill>
+                  <a:srgbClr val="14213D"/>
+                </a:solidFill>
+              </a:rPr>
+              <a:t>Tree output</a:t>
+            </a:r>
+            <a:endParaRPr lang="vi-VN" sz="1050"/>
+          </a:p>
+          <a:p>
+            <a:r>
+              <a:rPr lang="vi-VN" sz="1050" dirty="0">
+                <a:solidFill>
+                  <a:srgbClr val="14213D"/>
+                </a:solidFill>
+              </a:rPr>
+              <a:t>outputs/&lt;run_id&gt;_sentiment/&lt;aspect&gt;__pos/&lt;split&gt;_&lt;entity&gt;</a:t>
+            </a:r>
+            <a:endParaRPr lang="vi-VN" sz="1050"/>
+          </a:p>
+          <a:p>
+            <a:r>
+              <a:rPr lang="vi-VN" sz="1050" dirty="0">
+                <a:solidFill>
+                  <a:srgbClr val="14213D"/>
+                </a:solidFill>
+              </a:rPr>
+              <a:t>outputs/&lt;run_id&gt;_sentiment/&lt;aspect&gt;__neg/&lt;split&gt;_&lt;entity&gt;</a:t>
+            </a:r>
+            <a:endParaRPr lang="vi-VN" sz="1050"/>
+          </a:p>
+          <a:p>
+            <a:r>
+              <a:rPr lang="vi-VN" sz="1050" dirty="0">
+                <a:solidFill>
+                  <a:srgbClr val="14213D"/>
+                </a:solidFill>
+              </a:rPr>
+              <a:t>outputs/&lt;run_id&gt;_sentiment/&lt;aspect&gt;__neu/&lt;split&gt;_&lt;entity&gt;</a:t>
+            </a:r>
+            <a:endParaRPr lang="vi-VN" sz="1050"/>
           </a:p>
         </p:txBody>
       </p:sp>
@@ -812,6 +730,419 @@
                   <a:srgbClr val="2563EB"/>
                 </a:solidFill>
               </a:rPr>
+              <a:t>FILES FOR AUDIT</a:t>
+            </a:r>
+            <a:endParaRPr lang="vi-VN" sz="800"/>
+          </a:p>
+        </p:txBody>
+      </p:sp>
+      <p:sp>
+        <p:nvSpPr>
+          <p:cNvPr id="3" name="Text 3"/>
+          <p:cNvSpPr txBox="1"/>
+          <p:nvPr/>
+        </p:nvSpPr>
+        <p:spPr>
+          <a:xfrm>
+            <a:off x="502920" y="512064"/>
+            <a:ext cx="10972800" cy="457200"/>
+          </a:xfrm>
+          <a:prstGeom prst="rect">
+            <a:avLst/>
+          </a:prstGeom>
+          <a:noFill/>
+          <a:ln>
+            <a:noFill/>
+          </a:ln>
+        </p:spPr>
+        <p:txBody>
+          <a:bodyPr wrap="square" lIns="91440" tIns="45720" rIns="91440" bIns="45720"/>
+          <a:lstStyle/>
+          <a:p>
+            <a:r>
+              <a:rPr lang="vi-VN" sz="2300" dirty="0">
+                <a:b/>
+                <a:solidFill>
+                  <a:srgbClr val="14213D"/>
+                </a:solidFill>
+              </a:rPr>
+              <a:t>Stage 7: Export + scoring outputs</a:t>
+            </a:r>
+            <a:endParaRPr lang="vi-VN" sz="2300"/>
+          </a:p>
+        </p:txBody>
+      </p:sp>
+      <p:cxnSp>
+        <p:nvCxnSpPr>
+          <p:cNvPr id="4" name="Line 4"/>
+          <p:cNvCxnSpPr/>
+          <p:nvPr/>
+        </p:nvCxnSpPr>
+        <p:spPr>
+          <a:xfrm>
+            <a:off x="502920" y="1033271"/>
+            <a:ext cx="11155680" cy="0"/>
+          </a:xfrm>
+          <a:prstGeom prst="line">
+            <a:avLst/>
+          </a:prstGeom>
+          <a:ln w="12700">
+            <a:solidFill>
+              <a:srgbClr val="D8DEE9"/>
+            </a:solidFill>
+          </a:ln>
+        </p:spPr>
+      </p:cxnSp>
+      <p:sp>
+        <p:nvSpPr>
+          <p:cNvPr id="5" name="Text 5"/>
+          <p:cNvSpPr txBox="1"/>
+          <p:nvPr/>
+        </p:nvSpPr>
+        <p:spPr>
+          <a:xfrm>
+            <a:off x="685800" y="1234440"/>
+            <a:ext cx="4434840" cy="1234440"/>
+          </a:xfrm>
+          <a:prstGeom prst="rect">
+            <a:avLst/>
+          </a:prstGeom>
+          <a:solidFill>
+            <a:srgbClr val="FFFFFF"/>
+          </a:solidFill>
+          <a:ln w="9525">
+            <a:solidFill>
+              <a:srgbClr val="D8DEE9"/>
+            </a:solidFill>
+          </a:ln>
+        </p:spPr>
+        <p:txBody>
+          <a:bodyPr wrap="square" lIns="91440" tIns="45720" rIns="91440" bIns="45720"/>
+          <a:lstStyle/>
+          <a:p>
+            <a:r>
+              <a:rPr lang="vi-VN" sz="1150" dirty="0">
+                <a:solidFill>
+                  <a:srgbClr val="14213D"/>
+                </a:solidFill>
+              </a:rPr>
+              <a:t>Export input</a:t>
+            </a:r>
+            <a:endParaRPr lang="vi-VN" sz="1150"/>
+          </a:p>
+          <a:p>
+            <a:r>
+              <a:rPr lang="vi-VN" sz="1150" dirty="0">
+                <a:solidFill>
+                  <a:srgbClr val="14213D"/>
+                </a:solidFill>
+              </a:rPr>
+              <a:t>File tree:</a:t>
+            </a:r>
+            <a:endParaRPr lang="vi-VN" sz="1150"/>
+          </a:p>
+          <a:p>
+            <a:r>
+              <a:rPr lang="vi-VN" sz="1150" dirty="0">
+                <a:solidFill>
+                  <a:srgbClr val="14213D"/>
+                </a:solidFill>
+              </a:rPr>
+              <a:t>outputs/space_hasos_full_e20/</a:t>
+            </a:r>
+            <a:endParaRPr lang="vi-VN" sz="1150"/>
+          </a:p>
+          <a:p>
+            <a:r>
+              <a:rPr lang="vi-VN" sz="1150" dirty="0">
+                <a:solidFill>
+                  <a:srgbClr val="14213D"/>
+                </a:solidFill>
+              </a:rPr>
+              <a:t>outputs/space_hasos_full_e20_sentiment/</a:t>
+            </a:r>
+            <a:endParaRPr lang="vi-VN" sz="1150"/>
+          </a:p>
+        </p:txBody>
+      </p:sp>
+      <p:sp>
+        <p:nvSpPr>
+          <p:cNvPr id="6" name="Text 6"/>
+          <p:cNvSpPr txBox="1"/>
+          <p:nvPr/>
+        </p:nvSpPr>
+        <p:spPr>
+          <a:xfrm>
+            <a:off x="5440680" y="1234440"/>
+            <a:ext cx="2651760" cy="1417320"/>
+          </a:xfrm>
+          <a:prstGeom prst="rect">
+            <a:avLst/>
+          </a:prstGeom>
+          <a:solidFill>
+            <a:srgbClr val="ECFDF5"/>
+          </a:solidFill>
+          <a:ln w="9525">
+            <a:solidFill>
+              <a:srgbClr val="99F6E4"/>
+            </a:solidFill>
+          </a:ln>
+        </p:spPr>
+        <p:txBody>
+          <a:bodyPr wrap="square" lIns="91440" tIns="45720" rIns="91440" bIns="45720"/>
+          <a:lstStyle/>
+          <a:p>
+            <a:r>
+              <a:rPr lang="vi-VN" sz="1120" dirty="0">
+                <a:solidFill>
+                  <a:srgbClr val="14213D"/>
+                </a:solidFill>
+              </a:rPr>
+              <a:t>Export output</a:t>
+            </a:r>
+            <a:endParaRPr lang="vi-VN" sz="1120"/>
+          </a:p>
+          <a:p>
+            <a:r>
+              <a:rPr lang="vi-VN" sz="1120" dirty="0">
+                <a:solidFill>
+                  <a:srgbClr val="14213D"/>
+                </a:solidFill>
+              </a:rPr>
+              <a:t>aspect rows: 3660</a:t>
+            </a:r>
+            <a:endParaRPr lang="vi-VN" sz="1120"/>
+          </a:p>
+          <a:p>
+            <a:r>
+              <a:rPr lang="vi-VN" sz="1120" dirty="0">
+                <a:solidFill>
+                  <a:srgbClr val="14213D"/>
+                </a:solidFill>
+              </a:rPr>
+              <a:t>sentiment rows: 6110</a:t>
+            </a:r>
+            <a:endParaRPr lang="vi-VN" sz="1120"/>
+          </a:p>
+          <a:p>
+            <a:r>
+              <a:rPr lang="vi-VN" sz="1120" dirty="0">
+                <a:solidFill>
+                  <a:srgbClr val="14213D"/>
+                </a:solidFill>
+              </a:rPr>
+              <a:t>provenance rows: 3580</a:t>
+            </a:r>
+            <a:endParaRPr lang="vi-VN" sz="1120"/>
+          </a:p>
+          <a:p>
+            <a:r>
+              <a:rPr lang="vi-VN" sz="1120" dirty="0">
+                <a:solidFill>
+                  <a:srgbClr val="14213D"/>
+                </a:solidFill>
+              </a:rPr>
+              <a:t>JSONL + TSV line format</a:t>
+            </a:r>
+            <a:endParaRPr lang="vi-VN" sz="1120"/>
+          </a:p>
+        </p:txBody>
+      </p:sp>
+      <p:sp>
+        <p:nvSpPr>
+          <p:cNvPr id="7" name="Text 7"/>
+          <p:cNvSpPr txBox="1"/>
+          <p:nvPr/>
+        </p:nvSpPr>
+        <p:spPr>
+          <a:xfrm>
+            <a:off x="8366760" y="1234440"/>
+            <a:ext cx="2697480" cy="1417320"/>
+          </a:xfrm>
+          <a:prstGeom prst="rect">
+            <a:avLst/>
+          </a:prstGeom>
+          <a:solidFill>
+            <a:srgbClr val="FFFFFF"/>
+          </a:solidFill>
+          <a:ln w="9525">
+            <a:solidFill>
+              <a:srgbClr val="D8DEE9"/>
+            </a:solidFill>
+          </a:ln>
+        </p:spPr>
+        <p:txBody>
+          <a:bodyPr wrap="square" lIns="91440" tIns="45720" rIns="91440" bIns="45720"/>
+          <a:lstStyle/>
+          <a:p>
+            <a:r>
+              <a:rPr lang="vi-VN" sz="1150" dirty="0">
+                <a:solidFill>
+                  <a:srgbClr val="14213D"/>
+                </a:solidFill>
+              </a:rPr>
+              <a:t>Reference-free scores</a:t>
+            </a:r>
+            <a:endParaRPr lang="vi-VN" sz="1150"/>
+          </a:p>
+          <a:p>
+            <a:r>
+              <a:rPr lang="vi-VN" sz="1150" dirty="0">
+                <a:solidFill>
+                  <a:srgbClr val="14213D"/>
+                </a:solidFill>
+              </a:rPr>
+              <a:t>bert_f1_aspect: 0.8098</a:t>
+            </a:r>
+            <a:endParaRPr lang="vi-VN" sz="1150"/>
+          </a:p>
+          <a:p>
+            <a:r>
+              <a:rPr lang="vi-VN" sz="1150" dirty="0">
+                <a:solidFill>
+                  <a:srgbClr val="14213D"/>
+                </a:solidFill>
+              </a:rPr>
+              <a:t>bert_f1_source: 0.8074</a:t>
+            </a:r>
+            <a:endParaRPr lang="vi-VN" sz="1150"/>
+          </a:p>
+          <a:p>
+            <a:r>
+              <a:rPr lang="vi-VN" sz="1150" dirty="0">
+                <a:solidFill>
+                  <a:srgbClr val="14213D"/>
+                </a:solidFill>
+              </a:rPr>
+              <a:t>aspect_purity: 0.5517</a:t>
+            </a:r>
+            <a:endParaRPr lang="vi-VN" sz="1150"/>
+          </a:p>
+        </p:txBody>
+      </p:sp>
+      <p:sp>
+        <p:nvSpPr>
+          <p:cNvPr id="8" name="Text 8"/>
+          <p:cNvSpPr txBox="1"/>
+          <p:nvPr/>
+        </p:nvSpPr>
+        <p:spPr>
+          <a:xfrm>
+            <a:off x="685800" y="3520440"/>
+            <a:ext cx="10378440" cy="960120"/>
+          </a:xfrm>
+          <a:prstGeom prst="rect">
+            <a:avLst/>
+          </a:prstGeom>
+          <a:solidFill>
+            <a:srgbClr val="FFF7ED"/>
+          </a:solidFill>
+          <a:ln w="9525">
+            <a:solidFill>
+              <a:srgbClr val="FDBA74"/>
+            </a:solidFill>
+          </a:ln>
+        </p:spPr>
+        <p:txBody>
+          <a:bodyPr wrap="square" lIns="91440" tIns="45720" rIns="91440" bIns="45720"/>
+          <a:lstStyle/>
+          <a:p>
+            <a:r>
+              <a:rPr lang="vi-VN" sz="1150" dirty="0">
+                <a:solidFill>
+                  <a:srgbClr val="14213D"/>
+                </a:solidFill>
+              </a:rPr>
+              <a:t>Original ROUGE lane</a:t>
+            </a:r>
+            <a:endParaRPr lang="vi-VN" sz="1150"/>
+          </a:p>
+          <a:p>
+            <a:r>
+              <a:rPr lang="vi-VN" sz="1150" dirty="0">
+                <a:solidFill>
+                  <a:srgbClr val="14213D"/>
+                </a:solidFill>
+              </a:rPr>
+              <a:t>Input thiếu: data/hasos/gold/&lt;aspect&gt;/#ID#_[012].txt</a:t>
+            </a:r>
+            <a:endParaRPr lang="vi-VN" sz="1150"/>
+          </a:p>
+          <a:p>
+            <a:r>
+              <a:rPr lang="vi-VN" sz="1150" dirty="0">
+                <a:solidFill>
+                  <a:srgbClr val="14213D"/>
+                </a:solidFill>
+              </a:rPr>
+              <a:t>Khi có gold, rerun aspect_inference.py without --no_eval để sinh eval_&lt;run_id&gt;.json/txt.</a:t>
+            </a:r>
+            <a:endParaRPr lang="vi-VN" sz="1150"/>
+          </a:p>
+        </p:txBody>
+      </p:sp>
+    </p:spTree>
+  </p:cSld>
+  <p:clrMapOvr>
+    <a:masterClrMapping/>
+  </p:clrMapOvr>
+</p:sld>
+</file>
+
+<file path=ppt/slides/slide12.xml><?xml version="1.0" encoding="utf-8"?>
+<p:sld xmlns:a="http://schemas.openxmlformats.org/drawingml/2006/main" xmlns:r="http://schemas.openxmlformats.org/officeDocument/2006/relationships" xmlns:p="http://schemas.openxmlformats.org/presentationml/2006/main">
+  <p:cSld>
+    <p:bg>
+      <p:bgPr>
+        <a:solidFill>
+          <a:srgbClr val="F8FAFC"/>
+        </a:solidFill>
+      </p:bgPr>
+    </p:bg>
+    <p:spTree>
+      <p:nvGrpSpPr>
+        <p:cNvPr id="1" name=""/>
+        <p:cNvGrpSpPr/>
+        <p:nvPr/>
+      </p:nvGrpSpPr>
+      <p:grpSpPr>
+        <a:xfrm>
+          <a:off x="0" y="0"/>
+          <a:ext cx="12192000" cy="6858000"/>
+          <a:chOff x="0" y="0"/>
+          <a:chExt cx="12192000" cy="6858000"/>
+        </a:xfrm>
+      </p:grpSpPr>
+      <p:sp>
+        <p:nvSpPr>
+          <p:cNvPr id="2" name="Text 2"/>
+          <p:cNvSpPr txBox="1"/>
+          <p:nvPr/>
+        </p:nvSpPr>
+        <p:spPr>
+          <a:xfrm>
+            <a:off x="502920" y="228600"/>
+            <a:ext cx="10972800" cy="256032"/>
+          </a:xfrm>
+          <a:prstGeom prst="rect">
+            <a:avLst/>
+          </a:prstGeom>
+          <a:noFill/>
+          <a:ln>
+            <a:noFill/>
+          </a:ln>
+        </p:spPr>
+        <p:txBody>
+          <a:bodyPr wrap="square" lIns="91440" tIns="45720" rIns="91440" bIns="45720"/>
+          <a:lstStyle/>
+          <a:p>
+            <a:r>
+              <a:rPr lang="vi-VN" sz="800" dirty="0">
+                <a:b/>
+                <a:solidFill>
+                  <a:srgbClr val="2563EB"/>
+                </a:solidFill>
+              </a:rPr>
               <a:t>NEXT STEP</a:t>
             </a:r>
             <a:endParaRPr lang="vi-VN" sz="800"/>
@@ -3463,7 +3794,7 @@
                   <a:srgbClr val="2563EB"/>
                 </a:solidFill>
               </a:rPr>
-              <a:t>POST-RANK BUCKETS</a:t>
+              <a:t>AUDIT ARTIFACT</a:t>
             </a:r>
             <a:endParaRPr lang="vi-VN" sz="800"/>
           </a:p>
@@ -3499,7 +3830,7 @@
                   <a:srgbClr val="14213D"/>
                 </a:solidFill>
               </a:rPr>
-              <a:t>Stage 6: Sentiment split</a:t>
+              <a:t>Stage 5b: Sentence provenance</a:t>
             </a:r>
             <a:endParaRPr lang="vi-VN" sz="2300"/>
           </a:p>
@@ -3535,7 +3866,7 @@
         <p:spPr>
           <a:xfrm>
             <a:off x="685800" y="1234440"/>
-            <a:ext cx="4800600" cy="1234440"/>
+            <a:ext cx="4572000" cy="1143000"/>
           </a:xfrm>
           <a:prstGeom prst="rect">
             <a:avLst/>
@@ -3570,7 +3901,7 @@
                   <a:srgbClr val="14213D"/>
                 </a:solidFill>
               </a:rPr>
-              <a:t>Chỉ các sentences đã được chọn cho aspect summary. Sentiment không thay đổi ranking, chỉ tách bucket sau khi đã chọn câu.</a:t>
+              <a:t>Selected summary sentences + ranked sentence records + aspect seed hits + sentiment keyword hits.</a:t>
             </a:r>
             <a:endParaRPr lang="vi-VN" sz="1200"/>
           </a:p>
@@ -3584,8 +3915,8 @@
         </p:nvSpPr>
         <p:spPr>
           <a:xfrm>
-            <a:off x="5806440" y="1234440"/>
-            <a:ext cx="5166360" cy="1234440"/>
+            <a:off x="5532120" y="1234440"/>
+            <a:ext cx="5532120" cy="1143000"/>
           </a:xfrm>
           <a:prstGeom prst="rect">
             <a:avLst/>
@@ -3604,47 +3935,47 @@
           <a:lstStyle/>
           <a:p>
             <a:r>
-              <a:rPr lang="vi-VN" sz="1300" dirty="0">
-                <a:solidFill>
-                  <a:srgbClr val="14213D"/>
-                </a:solidFill>
-              </a:rPr>
-              <a:t>Output FAC_ROOM / entity 100597</a:t>
-            </a:r>
-            <a:endParaRPr lang="vi-VN" sz="1300"/>
-          </a:p>
-          <a:p>
-            <a:r>
-              <a:rPr lang="vi-VN" sz="1300" dirty="0">
-                <a:solidFill>
-                  <a:srgbClr val="14213D"/>
-                </a:solidFill>
-              </a:rPr>
-              <a:t>pos sentences: 3</a:t>
-            </a:r>
-            <a:endParaRPr lang="vi-VN" sz="1300"/>
-          </a:p>
-          <a:p>
-            <a:r>
-              <a:rPr lang="vi-VN" sz="1300" dirty="0">
-                <a:solidFill>
-                  <a:srgbClr val="14213D"/>
-                </a:solidFill>
-              </a:rPr>
-              <a:t>neg sentences: 0</a:t>
-            </a:r>
-            <a:endParaRPr lang="vi-VN" sz="1300"/>
-          </a:p>
-          <a:p>
-            <a:r>
-              <a:rPr lang="vi-VN" sz="1300" dirty="0">
-                <a:solidFill>
-                  <a:srgbClr val="14213D"/>
-                </a:solidFill>
-              </a:rPr>
-              <a:t>neu sentences: 0</a:t>
-            </a:r>
-            <a:endParaRPr lang="vi-VN" sz="1300"/>
+              <a:rPr lang="vi-VN" sz="1200" dirty="0">
+                <a:solidFill>
+                  <a:srgbClr val="14213D"/>
+                </a:solidFill>
+              </a:rPr>
+              <a:t>Output</a:t>
+            </a:r>
+            <a:endParaRPr lang="vi-VN" sz="1200"/>
+          </a:p>
+          <a:p>
+            <a:r>
+              <a:rPr lang="vi-VN" sz="1200" dirty="0">
+                <a:solidFill>
+                  <a:srgbClr val="14213D"/>
+                </a:solidFill>
+              </a:rPr>
+              <a:t>outputs/space_hasos_full_e20_provenance.jsonl</a:t>
+            </a:r>
+            <a:endParaRPr lang="vi-VN" sz="1200"/>
+          </a:p>
+          <a:p>
+            <a:r>
+              <a:rPr lang="vi-VN" sz="1200" dirty="0">
+                <a:solidFill>
+                  <a:srgbClr val="14213D"/>
+                </a:solidFill>
+              </a:rPr>
+              <a:t>rows: 3580</a:t>
+            </a:r>
+            <a:endParaRPr lang="vi-VN" sz="1200"/>
+          </a:p>
+          <a:p>
+            <a:r>
+              <a:rPr lang="vi-VN" sz="1200" dirty="0">
+                <a:solidFill>
+                  <a:srgbClr val="14213D"/>
+                </a:solidFill>
+              </a:rPr>
+              <a:t>coverage target: 1 row per summary sentence</a:t>
+            </a:r>
+            <a:endParaRPr lang="vi-VN" sz="1200"/>
           </a:p>
         </p:txBody>
       </p:sp>
@@ -3656,8 +3987,8 @@
         </p:nvSpPr>
         <p:spPr>
           <a:xfrm>
-            <a:off x="685800" y="3063240"/>
-            <a:ext cx="10287000" cy="1280160"/>
+            <a:off x="685800" y="2788920"/>
+            <a:ext cx="10378440" cy="1508760"/>
           </a:xfrm>
           <a:prstGeom prst="rect">
             <a:avLst/>
@@ -3676,47 +4007,47 @@
           <a:lstStyle/>
           <a:p>
             <a:r>
-              <a:rPr lang="vi-VN" sz="1050" dirty="0">
-                <a:solidFill>
-                  <a:srgbClr val="14213D"/>
-                </a:solidFill>
-              </a:rPr>
-              <a:t>Tree output</a:t>
-            </a:r>
-            <a:endParaRPr lang="vi-VN" sz="1050"/>
-          </a:p>
-          <a:p>
-            <a:r>
-              <a:rPr lang="vi-VN" sz="1050" dirty="0">
-                <a:solidFill>
-                  <a:srgbClr val="14213D"/>
-                </a:solidFill>
-              </a:rPr>
-              <a:t>outputs/&lt;run_id&gt;_sentiment/&lt;aspect&gt;__pos/&lt;split&gt;_&lt;entity&gt;</a:t>
-            </a:r>
-            <a:endParaRPr lang="vi-VN" sz="1050"/>
-          </a:p>
-          <a:p>
-            <a:r>
-              <a:rPr lang="vi-VN" sz="1050" dirty="0">
-                <a:solidFill>
-                  <a:srgbClr val="14213D"/>
-                </a:solidFill>
-              </a:rPr>
-              <a:t>outputs/&lt;run_id&gt;_sentiment/&lt;aspect&gt;__neg/&lt;split&gt;_&lt;entity&gt;</a:t>
-            </a:r>
-            <a:endParaRPr lang="vi-VN" sz="1050"/>
-          </a:p>
-          <a:p>
-            <a:r>
-              <a:rPr lang="vi-VN" sz="1050" dirty="0">
-                <a:solidFill>
-                  <a:srgbClr val="14213D"/>
-                </a:solidFill>
-              </a:rPr>
-              <a:t>outputs/&lt;run_id&gt;_sentiment/&lt;aspect&gt;__neu/&lt;split&gt;_&lt;entity&gt;</a:t>
-            </a:r>
-            <a:endParaRPr lang="vi-VN" sz="1050"/>
+              <a:rPr lang="vi-VN" sz="950" dirty="0">
+                <a:solidFill>
+                  <a:srgbClr val="14213D"/>
+                </a:solidFill>
+              </a:rPr>
+              <a:t>Sample provenance</a:t>
+            </a:r>
+            <a:endParaRPr lang="vi-VN" sz="950"/>
+          </a:p>
+          <a:p>
+            <a:r>
+              <a:rPr lang="vi-VN" sz="950" dirty="0">
+                <a:solidFill>
+                  <a:srgbClr val="14213D"/>
+                </a:solidFill>
+              </a:rPr>
+              <a:t>entity=100597 aspect=FAC_ROOM idx=1</a:t>
+            </a:r>
+            <a:endParaRPr lang="vi-VN" sz="950"/>
+          </a:p>
+          <a:p>
+            <a:r>
+              <a:rPr lang="vi-VN" sz="950" dirty="0">
+                <a:solidFill>
+                  <a:srgbClr val="14213D"/>
+                </a:solidFill>
+              </a:rPr>
+              <a:t>review=UR116685264 sent_idx=3 rank=1 score=0.004735996946692467</a:t>
+            </a:r>
+            <a:endParaRPr lang="vi-VN" sz="950"/>
+          </a:p>
+          <a:p>
+            <a:r>
+              <a:rPr lang="vi-VN" sz="950" dirty="0">
+                <a:solidFill>
+                  <a:srgbClr val="14213D"/>
+                </a:solidFill>
+              </a:rPr>
+              <a:t>seed=['room'] sentiment=pos ['clean', 'comfortable']</a:t>
+            </a:r>
+            <a:endParaRPr lang="vi-VN" sz="950"/>
           </a:p>
         </p:txBody>
       </p:sp>
